--- a/docs/instructions/Polish/EU_SAE_Workbench_Guide_1_Install_and_Start_PL.pptx
+++ b/docs/instructions/Polish/EU_SAE_Workbench_Guide_1_Install_and_Start_PL.pptx
@@ -4932,7 +4932,7 @@
                   <a:srgbClr val="33415C"/>
                 </a:solidFill>
               </a:rPr>
-              <a:t>W sekcji Assets, np. EU_SAE_520_w5p.zip, a nie archiwa „Source code”.</a:t>
+              <a:t>W sekcji Assets, np. EU_SAE_520_w5q.zip, a nie archiwa „Source code”.</a:t>
             </a:r>
             <a:endParaRPr lang="pl-PL" sz="1300"/>
           </a:p>
@@ -5232,7 +5232,7 @@
                 <a:ea typeface="Courier New" pitchFamily="34" charset="-122"/>
                 <a:cs typeface="Courier New" pitchFamily="34" charset="-120"/>
               </a:rPr>
-              <a:t>EU_SAE_520_w5p/</a:t>
+              <a:t>EU_SAE_520_w5q/</a:t>
             </a:r>
             <a:endParaRPr lang="pl-PL" sz="1050"/>
           </a:p>

--- a/docs/instructions/Polish/EU_SAE_Workbench_Guide_1_Install_and_Start_PL.pptx
+++ b/docs/instructions/Polish/EU_SAE_Workbench_Guide_1_Install_and_Start_PL.pptx
@@ -4932,7 +4932,7 @@
                   <a:srgbClr val="33415C"/>
                 </a:solidFill>
               </a:rPr>
-              <a:t>W sekcji Assets, np. EU_SAE_520_w5q.zip, a nie archiwa „Source code”.</a:t>
+              <a:t>W sekcji Assets, np. EU_SAE_520_w5r.zip, a nie archiwa „Source code”.</a:t>
             </a:r>
             <a:endParaRPr lang="pl-PL" sz="1300"/>
           </a:p>
@@ -5232,7 +5232,7 @@
                 <a:ea typeface="Courier New" pitchFamily="34" charset="-122"/>
                 <a:cs typeface="Courier New" pitchFamily="34" charset="-120"/>
               </a:rPr>
-              <a:t>EU_SAE_520_w5q/</a:t>
+              <a:t>EU_SAE_520_w5r/</a:t>
             </a:r>
             <a:endParaRPr lang="pl-PL" sz="1050"/>
           </a:p>
@@ -7843,16 +7843,13 @@
             <a:pPr indent="0" marL="0">
               <a:buNone/>
             </a:pPr>
-            <a:pPr indent="0" marL="0">
-              <a:buNone/>
-            </a:pPr>
             <a:r>
               <a:rPr lang="pl-PL" sz="1250" b="1">
                 <a:solidFill>
                   <a:srgbClr val="33415C"/>
                 </a:solidFill>
               </a:rPr>
-              <a:t xml:space="preserve">Jeśli raport się nie pojawi: </a:t>
+              <a:t>Jeśli raport się nie pojawi: </a:t>
             </a:r>
             <a:r>
               <a:rPr lang="pl-PL" sz="1250">

--- a/docs/instructions/Polish/EU_SAE_Workbench_Guide_1_Install_and_Start_PL.pptx
+++ b/docs/instructions/Polish/EU_SAE_Workbench_Guide_1_Install_and_Start_PL.pptx
@@ -4932,7 +4932,7 @@
                   <a:srgbClr val="33415C"/>
                 </a:solidFill>
               </a:rPr>
-              <a:t>W sekcji Assets, np. EU_SAE_520_w5r.zip, a nie archiwa „Source code”.</a:t>
+              <a:t>W sekcji Assets, np. EU_SAE_520_w5s.zip, a nie archiwa „Source code”.</a:t>
             </a:r>
             <a:endParaRPr lang="pl-PL" sz="1300"/>
           </a:p>
@@ -5232,7 +5232,7 @@
                 <a:ea typeface="Courier New" pitchFamily="34" charset="-122"/>
                 <a:cs typeface="Courier New" pitchFamily="34" charset="-120"/>
               </a:rPr>
-              <a:t>EU_SAE_520_w5r/</a:t>
+              <a:t>EU_SAE_520_w5s/</a:t>
             </a:r>
             <a:endParaRPr lang="pl-PL" sz="1050"/>
           </a:p>
